--- a/public/documents/international/project-lab/project-lab-ai-erasmus-basic-2026.pptx
+++ b/public/documents/international/project-lab/project-lab-ai-erasmus-basic-2026.pptx
@@ -13550,7 +13550,7 @@
             </a:pPr>
             <a:r>
               <a:rPr sz="1600"/>
-              <a:t>Прозорість: перевіряйте вимоги конкретного конкурсу щодо використання ШІ та застосовні правила EU AI Act.</a:t>
+              <a:t>Перевіряйте вимоги конкретного конкурсу щодо використання ШІ; дотримуйтеся правил оригінальності, точності та інтелектуальної власності.</a:t>
             </a:r>
             <a:endParaRPr/>
           </a:p>
